--- a/ComputerVision/Lecture 04 - Finding Components/Lecture 04 - Component Segmentation.pptx
+++ b/ComputerVision/Lecture 04 - Finding Components/Lecture 04 - Component Segmentation.pptx
@@ -50,6 +50,7 @@
     <p:sldId id="272" r:id="rId43"/>
     <p:sldId id="273" r:id="rId44"/>
     <p:sldId id="274" r:id="rId45"/>
+    <p:sldId id="275" r:id="rId46"/>
   </p:sldIdLst>
   <p:sldSz cx="10080625" cy="7559675"/>
   <p:notesSz cx="7559675" cy="10691813"/>
@@ -380,7 +381,7 @@
             <a:pPr indent="0" algn="r">
               <a:buNone/>
             </a:pPr>
-            <a:fld id="{04F75951-25EF-4211-901D-730376EEEE63}" type="slidenum">
+            <a:fld id="{F5C0E76C-6D6B-442C-8017-B824525908BB}" type="slidenum">
               <a:rPr b="0" lang="en-US" sz="1400" spc="-1" strike="noStrike">
                 <a:solidFill>
                   <a:srgbClr val="000000"/>
@@ -423,7 +424,7 @@
       </p:grpSpPr>
       <p:sp>
         <p:nvSpPr>
-          <p:cNvPr id="357" name="PlaceHolder 1"/>
+          <p:cNvPr id="361" name="PlaceHolder 1"/>
           <p:cNvSpPr>
             <a:spLocks noGrp="1"/>
           </p:cNvSpPr>
@@ -446,7 +447,7 @@
       </p:sp>
       <p:sp>
         <p:nvSpPr>
-          <p:cNvPr id="358" name="PlaceHolder 2"/>
+          <p:cNvPr id="362" name="PlaceHolder 2"/>
           <p:cNvSpPr>
             <a:spLocks noGrp="1"/>
           </p:cNvSpPr>
@@ -486,7 +487,7 @@
       </p:sp>
       <p:sp>
         <p:nvSpPr>
-          <p:cNvPr id="359" name="CustomShape 3"/>
+          <p:cNvPr id="363" name="CustomShape 3"/>
           <p:cNvSpPr/>
           <p:nvPr/>
         </p:nvSpPr>
@@ -562,7 +563,7 @@
       </p:grpSpPr>
       <p:sp>
         <p:nvSpPr>
-          <p:cNvPr id="384" name="PlaceHolder 1"/>
+          <p:cNvPr id="388" name="PlaceHolder 1"/>
           <p:cNvSpPr>
             <a:spLocks noGrp="1"/>
           </p:cNvSpPr>
@@ -585,7 +586,7 @@
       </p:sp>
       <p:sp>
         <p:nvSpPr>
-          <p:cNvPr id="385" name="PlaceHolder 2"/>
+          <p:cNvPr id="389" name="PlaceHolder 2"/>
           <p:cNvSpPr>
             <a:spLocks noGrp="1"/>
           </p:cNvSpPr>
@@ -625,7 +626,7 @@
       </p:sp>
       <p:sp>
         <p:nvSpPr>
-          <p:cNvPr id="386" name="CustomShape 3"/>
+          <p:cNvPr id="390" name="CustomShape 3"/>
           <p:cNvSpPr/>
           <p:nvPr/>
         </p:nvSpPr>
@@ -701,7 +702,7 @@
       </p:grpSpPr>
       <p:sp>
         <p:nvSpPr>
-          <p:cNvPr id="387" name="PlaceHolder 1"/>
+          <p:cNvPr id="391" name="PlaceHolder 1"/>
           <p:cNvSpPr>
             <a:spLocks noGrp="1"/>
           </p:cNvSpPr>
@@ -724,7 +725,7 @@
       </p:sp>
       <p:sp>
         <p:nvSpPr>
-          <p:cNvPr id="388" name="PlaceHolder 2"/>
+          <p:cNvPr id="392" name="PlaceHolder 2"/>
           <p:cNvSpPr>
             <a:spLocks noGrp="1"/>
           </p:cNvSpPr>
@@ -764,7 +765,7 @@
       </p:sp>
       <p:sp>
         <p:nvSpPr>
-          <p:cNvPr id="389" name="CustomShape 3"/>
+          <p:cNvPr id="393" name="CustomShape 3"/>
           <p:cNvSpPr/>
           <p:nvPr/>
         </p:nvSpPr>
@@ -840,7 +841,7 @@
       </p:grpSpPr>
       <p:sp>
         <p:nvSpPr>
-          <p:cNvPr id="390" name="PlaceHolder 1"/>
+          <p:cNvPr id="394" name="PlaceHolder 1"/>
           <p:cNvSpPr>
             <a:spLocks noGrp="1"/>
           </p:cNvSpPr>
@@ -863,7 +864,7 @@
       </p:sp>
       <p:sp>
         <p:nvSpPr>
-          <p:cNvPr id="391" name="PlaceHolder 2"/>
+          <p:cNvPr id="395" name="PlaceHolder 2"/>
           <p:cNvSpPr>
             <a:spLocks noGrp="1"/>
           </p:cNvSpPr>
@@ -903,7 +904,7 @@
       </p:sp>
       <p:sp>
         <p:nvSpPr>
-          <p:cNvPr id="392" name="CustomShape 3"/>
+          <p:cNvPr id="396" name="CustomShape 3"/>
           <p:cNvSpPr/>
           <p:nvPr/>
         </p:nvSpPr>
@@ -979,7 +980,7 @@
       </p:grpSpPr>
       <p:sp>
         <p:nvSpPr>
-          <p:cNvPr id="393" name="PlaceHolder 1"/>
+          <p:cNvPr id="397" name="PlaceHolder 1"/>
           <p:cNvSpPr>
             <a:spLocks noGrp="1"/>
           </p:cNvSpPr>
@@ -1002,7 +1003,7 @@
       </p:sp>
       <p:sp>
         <p:nvSpPr>
-          <p:cNvPr id="394" name="PlaceHolder 2"/>
+          <p:cNvPr id="398" name="PlaceHolder 2"/>
           <p:cNvSpPr>
             <a:spLocks noGrp="1"/>
           </p:cNvSpPr>
@@ -1042,7 +1043,7 @@
       </p:sp>
       <p:sp>
         <p:nvSpPr>
-          <p:cNvPr id="395" name="CustomShape 3"/>
+          <p:cNvPr id="399" name="CustomShape 3"/>
           <p:cNvSpPr/>
           <p:nvPr/>
         </p:nvSpPr>
@@ -1118,7 +1119,7 @@
       </p:grpSpPr>
       <p:sp>
         <p:nvSpPr>
-          <p:cNvPr id="396" name="PlaceHolder 1"/>
+          <p:cNvPr id="400" name="PlaceHolder 1"/>
           <p:cNvSpPr>
             <a:spLocks noGrp="1"/>
           </p:cNvSpPr>
@@ -1141,7 +1142,7 @@
       </p:sp>
       <p:sp>
         <p:nvSpPr>
-          <p:cNvPr id="397" name="PlaceHolder 2"/>
+          <p:cNvPr id="401" name="PlaceHolder 2"/>
           <p:cNvSpPr>
             <a:spLocks noGrp="1"/>
           </p:cNvSpPr>
@@ -1181,7 +1182,7 @@
       </p:sp>
       <p:sp>
         <p:nvSpPr>
-          <p:cNvPr id="398" name="CustomShape 3"/>
+          <p:cNvPr id="402" name="CustomShape 3"/>
           <p:cNvSpPr/>
           <p:nvPr/>
         </p:nvSpPr>
@@ -1257,7 +1258,7 @@
       </p:grpSpPr>
       <p:sp>
         <p:nvSpPr>
-          <p:cNvPr id="399" name="PlaceHolder 1"/>
+          <p:cNvPr id="403" name="PlaceHolder 1"/>
           <p:cNvSpPr>
             <a:spLocks noGrp="1"/>
           </p:cNvSpPr>
@@ -1280,7 +1281,7 @@
       </p:sp>
       <p:sp>
         <p:nvSpPr>
-          <p:cNvPr id="400" name="PlaceHolder 2"/>
+          <p:cNvPr id="404" name="PlaceHolder 2"/>
           <p:cNvSpPr>
             <a:spLocks noGrp="1"/>
           </p:cNvSpPr>
@@ -1320,7 +1321,7 @@
       </p:sp>
       <p:sp>
         <p:nvSpPr>
-          <p:cNvPr id="401" name="CustomShape 3"/>
+          <p:cNvPr id="405" name="CustomShape 3"/>
           <p:cNvSpPr/>
           <p:nvPr/>
         </p:nvSpPr>
@@ -1396,7 +1397,7 @@
       </p:grpSpPr>
       <p:sp>
         <p:nvSpPr>
-          <p:cNvPr id="402" name="PlaceHolder 1"/>
+          <p:cNvPr id="406" name="PlaceHolder 1"/>
           <p:cNvSpPr>
             <a:spLocks noGrp="1"/>
           </p:cNvSpPr>
@@ -1419,7 +1420,7 @@
       </p:sp>
       <p:sp>
         <p:nvSpPr>
-          <p:cNvPr id="403" name="PlaceHolder 2"/>
+          <p:cNvPr id="407" name="PlaceHolder 2"/>
           <p:cNvSpPr>
             <a:spLocks noGrp="1"/>
           </p:cNvSpPr>
@@ -1459,7 +1460,7 @@
       </p:sp>
       <p:sp>
         <p:nvSpPr>
-          <p:cNvPr id="404" name="CustomShape 3"/>
+          <p:cNvPr id="408" name="CustomShape 3"/>
           <p:cNvSpPr/>
           <p:nvPr/>
         </p:nvSpPr>
@@ -1535,7 +1536,7 @@
       </p:grpSpPr>
       <p:sp>
         <p:nvSpPr>
-          <p:cNvPr id="405" name="PlaceHolder 1"/>
+          <p:cNvPr id="409" name="PlaceHolder 1"/>
           <p:cNvSpPr>
             <a:spLocks noGrp="1"/>
           </p:cNvSpPr>
@@ -1558,7 +1559,7 @@
       </p:sp>
       <p:sp>
         <p:nvSpPr>
-          <p:cNvPr id="406" name="PlaceHolder 2"/>
+          <p:cNvPr id="410" name="PlaceHolder 2"/>
           <p:cNvSpPr>
             <a:spLocks noGrp="1"/>
           </p:cNvSpPr>
@@ -1598,7 +1599,7 @@
       </p:sp>
       <p:sp>
         <p:nvSpPr>
-          <p:cNvPr id="407" name="CustomShape 3"/>
+          <p:cNvPr id="411" name="CustomShape 3"/>
           <p:cNvSpPr/>
           <p:nvPr/>
         </p:nvSpPr>
@@ -1674,7 +1675,7 @@
       </p:grpSpPr>
       <p:sp>
         <p:nvSpPr>
-          <p:cNvPr id="408" name="PlaceHolder 1"/>
+          <p:cNvPr id="412" name="PlaceHolder 1"/>
           <p:cNvSpPr>
             <a:spLocks noGrp="1"/>
           </p:cNvSpPr>
@@ -1697,7 +1698,7 @@
       </p:sp>
       <p:sp>
         <p:nvSpPr>
-          <p:cNvPr id="409" name="PlaceHolder 2"/>
+          <p:cNvPr id="413" name="PlaceHolder 2"/>
           <p:cNvSpPr>
             <a:spLocks noGrp="1"/>
           </p:cNvSpPr>
@@ -1737,7 +1738,7 @@
       </p:sp>
       <p:sp>
         <p:nvSpPr>
-          <p:cNvPr id="410" name="CustomShape 3"/>
+          <p:cNvPr id="414" name="CustomShape 3"/>
           <p:cNvSpPr/>
           <p:nvPr/>
         </p:nvSpPr>
@@ -1813,7 +1814,7 @@
       </p:grpSpPr>
       <p:sp>
         <p:nvSpPr>
-          <p:cNvPr id="411" name="PlaceHolder 1"/>
+          <p:cNvPr id="415" name="PlaceHolder 1"/>
           <p:cNvSpPr>
             <a:spLocks noGrp="1"/>
           </p:cNvSpPr>
@@ -1836,7 +1837,7 @@
       </p:sp>
       <p:sp>
         <p:nvSpPr>
-          <p:cNvPr id="412" name="PlaceHolder 2"/>
+          <p:cNvPr id="416" name="PlaceHolder 2"/>
           <p:cNvSpPr>
             <a:spLocks noGrp="1"/>
           </p:cNvSpPr>
@@ -1876,7 +1877,7 @@
       </p:sp>
       <p:sp>
         <p:nvSpPr>
-          <p:cNvPr id="413" name="CustomShape 3"/>
+          <p:cNvPr id="417" name="CustomShape 3"/>
           <p:cNvSpPr/>
           <p:nvPr/>
         </p:nvSpPr>
@@ -1952,7 +1953,7 @@
       </p:grpSpPr>
       <p:sp>
         <p:nvSpPr>
-          <p:cNvPr id="360" name="PlaceHolder 1"/>
+          <p:cNvPr id="364" name="PlaceHolder 1"/>
           <p:cNvSpPr>
             <a:spLocks noGrp="1"/>
           </p:cNvSpPr>
@@ -1975,7 +1976,7 @@
       </p:sp>
       <p:sp>
         <p:nvSpPr>
-          <p:cNvPr id="361" name="PlaceHolder 2"/>
+          <p:cNvPr id="365" name="PlaceHolder 2"/>
           <p:cNvSpPr>
             <a:spLocks noGrp="1"/>
           </p:cNvSpPr>
@@ -2015,7 +2016,146 @@
       </p:sp>
       <p:sp>
         <p:nvSpPr>
-          <p:cNvPr id="362" name="CustomShape 3"/>
+          <p:cNvPr id="366" name="CustomShape 3"/>
+          <p:cNvSpPr/>
+          <p:nvPr/>
+        </p:nvSpPr>
+        <p:spPr>
+          <a:xfrm>
+            <a:off x="0" y="10155240"/>
+            <a:ext cx="3270600" cy="531000"/>
+          </a:xfrm>
+          <a:prstGeom prst="rect">
+            <a:avLst/>
+          </a:prstGeom>
+          <a:noFill/>
+          <a:ln w="0">
+            <a:noFill/>
+          </a:ln>
+        </p:spPr>
+        <p:style>
+          <a:lnRef idx="0"/>
+          <a:fillRef idx="0"/>
+          <a:effectRef idx="0"/>
+          <a:fontRef idx="minor"/>
+        </p:style>
+        <p:txBody>
+          <a:bodyPr lIns="90000" rIns="90000" tIns="45000" bIns="45000" anchor="b">
+            <a:noAutofit/>
+          </a:bodyPr>
+          <a:p>
+            <a:pPr defTabSz="914400">
+              <a:lnSpc>
+                <a:spcPct val="100000"/>
+              </a:lnSpc>
+            </a:pPr>
+            <a:r>
+              <a:rPr b="0" lang="pt-BR" sz="1200" spc="-1" strike="noStrike">
+                <a:solidFill>
+                  <a:srgbClr val="000000"/>
+                </a:solidFill>
+                <a:latin typeface="Times New Roman"/>
+                <a:ea typeface="+mn-ea"/>
+              </a:rPr>
+              <a:t>Prof. André Hochuli</a:t>
+            </a:r>
+            <a:endParaRPr b="0" lang="en-US" sz="1200" spc="-1" strike="noStrike">
+              <a:solidFill>
+                <a:srgbClr val="000000"/>
+              </a:solidFill>
+              <a:latin typeface="Arial"/>
+            </a:endParaRPr>
+          </a:p>
+        </p:txBody>
+      </p:sp>
+    </p:spTree>
+  </p:cSld>
+</p:notes>
+</file>
+
+<file path=ppt/notesSlides/notesSlide20.xml><?xml version="1.0" encoding="utf-8"?>
+<p:notes xmlns:a="http://schemas.openxmlformats.org/drawingml/2006/main" xmlns:p="http://schemas.openxmlformats.org/presentationml/2006/main" xmlns:r="http://schemas.openxmlformats.org/officeDocument/2006/relationships" xmlns:p14="http://schemas.microsoft.com/office/powerpoint/2010/main" xmlns:p15="http://schemas.microsoft.com/office/powerpoint/2012/main" xmlns:mc="http://schemas.openxmlformats.org/markup-compatibility/2006">
+  <p:cSld>
+    <p:spTree>
+      <p:nvGrpSpPr>
+        <p:cNvPr id="1" name=""/>
+        <p:cNvGrpSpPr/>
+        <p:nvPr/>
+      </p:nvGrpSpPr>
+      <p:grpSpPr>
+        <a:xfrm>
+          <a:off x="0" y="0"/>
+          <a:ext cx="0" cy="0"/>
+          <a:chOff x="0" y="0"/>
+          <a:chExt cx="0" cy="0"/>
+        </a:xfrm>
+      </p:grpSpPr>
+      <p:sp>
+        <p:nvSpPr>
+          <p:cNvPr id="418" name="PlaceHolder 1"/>
+          <p:cNvSpPr>
+            <a:spLocks noGrp="1"/>
+          </p:cNvSpPr>
+          <p:nvPr>
+            <p:ph type="sldImg"/>
+          </p:nvPr>
+        </p:nvSpPr>
+        <p:spPr>
+          <a:xfrm>
+            <a:off x="1376280" y="1336680"/>
+            <a:ext cx="4802040" cy="3601800"/>
+          </a:xfrm>
+          <a:prstGeom prst="rect">
+            <a:avLst/>
+          </a:prstGeom>
+          <a:ln w="0">
+            <a:noFill/>
+          </a:ln>
+        </p:spPr>
+      </p:sp>
+      <p:sp>
+        <p:nvSpPr>
+          <p:cNvPr id="419" name="PlaceHolder 2"/>
+          <p:cNvSpPr>
+            <a:spLocks noGrp="1"/>
+          </p:cNvSpPr>
+          <p:nvPr>
+            <p:ph type="body"/>
+          </p:nvPr>
+        </p:nvSpPr>
+        <p:spPr>
+          <a:xfrm>
+            <a:off x="756000" y="5145120"/>
+            <a:ext cx="6042240" cy="4204440"/>
+          </a:xfrm>
+          <a:prstGeom prst="rect">
+            <a:avLst/>
+          </a:prstGeom>
+          <a:noFill/>
+          <a:ln w="0">
+            <a:noFill/>
+          </a:ln>
+        </p:spPr>
+        <p:txBody>
+          <a:bodyPr lIns="0" rIns="0" tIns="0" bIns="0" anchor="t">
+            <a:noAutofit/>
+          </a:bodyPr>
+          <a:p>
+            <a:pPr marL="216000" indent="-216000">
+              <a:buNone/>
+            </a:pPr>
+            <a:endParaRPr b="0" lang="en-US" sz="1800" spc="-1" strike="noStrike">
+              <a:solidFill>
+                <a:srgbClr val="000000"/>
+              </a:solidFill>
+              <a:latin typeface="Arial"/>
+            </a:endParaRPr>
+          </a:p>
+        </p:txBody>
+      </p:sp>
+      <p:sp>
+        <p:nvSpPr>
+          <p:cNvPr id="420" name="CustomShape 13"/>
           <p:cNvSpPr/>
           <p:nvPr/>
         </p:nvSpPr>
@@ -2091,7 +2231,7 @@
       </p:grpSpPr>
       <p:sp>
         <p:nvSpPr>
-          <p:cNvPr id="363" name="PlaceHolder 1"/>
+          <p:cNvPr id="367" name="PlaceHolder 1"/>
           <p:cNvSpPr>
             <a:spLocks noGrp="1"/>
           </p:cNvSpPr>
@@ -2114,7 +2254,7 @@
       </p:sp>
       <p:sp>
         <p:nvSpPr>
-          <p:cNvPr id="364" name="PlaceHolder 2"/>
+          <p:cNvPr id="368" name="PlaceHolder 2"/>
           <p:cNvSpPr>
             <a:spLocks noGrp="1"/>
           </p:cNvSpPr>
@@ -2154,7 +2294,7 @@
       </p:sp>
       <p:sp>
         <p:nvSpPr>
-          <p:cNvPr id="365" name="CustomShape 9"/>
+          <p:cNvPr id="369" name="CustomShape 9"/>
           <p:cNvSpPr/>
           <p:nvPr/>
         </p:nvSpPr>
@@ -2230,7 +2370,7 @@
       </p:grpSpPr>
       <p:sp>
         <p:nvSpPr>
-          <p:cNvPr id="366" name="PlaceHolder 1"/>
+          <p:cNvPr id="370" name="PlaceHolder 1"/>
           <p:cNvSpPr>
             <a:spLocks noGrp="1"/>
           </p:cNvSpPr>
@@ -2253,7 +2393,7 @@
       </p:sp>
       <p:sp>
         <p:nvSpPr>
-          <p:cNvPr id="367" name="PlaceHolder 2"/>
+          <p:cNvPr id="371" name="PlaceHolder 2"/>
           <p:cNvSpPr>
             <a:spLocks noGrp="1"/>
           </p:cNvSpPr>
@@ -2293,7 +2433,7 @@
       </p:sp>
       <p:sp>
         <p:nvSpPr>
-          <p:cNvPr id="368" name="CustomShape 3"/>
+          <p:cNvPr id="372" name="CustomShape 3"/>
           <p:cNvSpPr/>
           <p:nvPr/>
         </p:nvSpPr>
@@ -2369,7 +2509,7 @@
       </p:grpSpPr>
       <p:sp>
         <p:nvSpPr>
-          <p:cNvPr id="369" name="PlaceHolder 1"/>
+          <p:cNvPr id="373" name="PlaceHolder 1"/>
           <p:cNvSpPr>
             <a:spLocks noGrp="1"/>
           </p:cNvSpPr>
@@ -2392,7 +2532,7 @@
       </p:sp>
       <p:sp>
         <p:nvSpPr>
-          <p:cNvPr id="370" name="PlaceHolder 2"/>
+          <p:cNvPr id="374" name="PlaceHolder 2"/>
           <p:cNvSpPr>
             <a:spLocks noGrp="1"/>
           </p:cNvSpPr>
@@ -2432,7 +2572,7 @@
       </p:sp>
       <p:sp>
         <p:nvSpPr>
-          <p:cNvPr id="371" name="CustomShape 3"/>
+          <p:cNvPr id="375" name="CustomShape 3"/>
           <p:cNvSpPr/>
           <p:nvPr/>
         </p:nvSpPr>
@@ -2508,7 +2648,7 @@
       </p:grpSpPr>
       <p:sp>
         <p:nvSpPr>
-          <p:cNvPr id="372" name="PlaceHolder 1"/>
+          <p:cNvPr id="376" name="PlaceHolder 1"/>
           <p:cNvSpPr>
             <a:spLocks noGrp="1"/>
           </p:cNvSpPr>
@@ -2531,7 +2671,7 @@
       </p:sp>
       <p:sp>
         <p:nvSpPr>
-          <p:cNvPr id="373" name="PlaceHolder 2"/>
+          <p:cNvPr id="377" name="PlaceHolder 2"/>
           <p:cNvSpPr>
             <a:spLocks noGrp="1"/>
           </p:cNvSpPr>
@@ -2571,7 +2711,7 @@
       </p:sp>
       <p:sp>
         <p:nvSpPr>
-          <p:cNvPr id="374" name="CustomShape 3"/>
+          <p:cNvPr id="378" name="CustomShape 3"/>
           <p:cNvSpPr/>
           <p:nvPr/>
         </p:nvSpPr>
@@ -2647,7 +2787,7 @@
       </p:grpSpPr>
       <p:sp>
         <p:nvSpPr>
-          <p:cNvPr id="375" name="PlaceHolder 1"/>
+          <p:cNvPr id="379" name="PlaceHolder 1"/>
           <p:cNvSpPr>
             <a:spLocks noGrp="1"/>
           </p:cNvSpPr>
@@ -2670,7 +2810,7 @@
       </p:sp>
       <p:sp>
         <p:nvSpPr>
-          <p:cNvPr id="376" name="PlaceHolder 2"/>
+          <p:cNvPr id="380" name="PlaceHolder 2"/>
           <p:cNvSpPr>
             <a:spLocks noGrp="1"/>
           </p:cNvSpPr>
@@ -2710,7 +2850,7 @@
       </p:sp>
       <p:sp>
         <p:nvSpPr>
-          <p:cNvPr id="377" name="CustomShape 3"/>
+          <p:cNvPr id="381" name="CustomShape 3"/>
           <p:cNvSpPr/>
           <p:nvPr/>
         </p:nvSpPr>
@@ -2786,7 +2926,7 @@
       </p:grpSpPr>
       <p:sp>
         <p:nvSpPr>
-          <p:cNvPr id="378" name="PlaceHolder 1"/>
+          <p:cNvPr id="382" name="PlaceHolder 1"/>
           <p:cNvSpPr>
             <a:spLocks noGrp="1"/>
           </p:cNvSpPr>
@@ -2809,7 +2949,7 @@
       </p:sp>
       <p:sp>
         <p:nvSpPr>
-          <p:cNvPr id="379" name="PlaceHolder 2"/>
+          <p:cNvPr id="383" name="PlaceHolder 2"/>
           <p:cNvSpPr>
             <a:spLocks noGrp="1"/>
           </p:cNvSpPr>
@@ -2849,7 +2989,7 @@
       </p:sp>
       <p:sp>
         <p:nvSpPr>
-          <p:cNvPr id="380" name="CustomShape 3"/>
+          <p:cNvPr id="384" name="CustomShape 3"/>
           <p:cNvSpPr/>
           <p:nvPr/>
         </p:nvSpPr>
@@ -2925,7 +3065,7 @@
       </p:grpSpPr>
       <p:sp>
         <p:nvSpPr>
-          <p:cNvPr id="381" name="PlaceHolder 1"/>
+          <p:cNvPr id="385" name="PlaceHolder 1"/>
           <p:cNvSpPr>
             <a:spLocks noGrp="1"/>
           </p:cNvSpPr>
@@ -2948,7 +3088,7 @@
       </p:sp>
       <p:sp>
         <p:nvSpPr>
-          <p:cNvPr id="382" name="PlaceHolder 2"/>
+          <p:cNvPr id="386" name="PlaceHolder 2"/>
           <p:cNvSpPr>
             <a:spLocks noGrp="1"/>
           </p:cNvSpPr>
@@ -2988,7 +3128,7 @@
       </p:sp>
       <p:sp>
         <p:nvSpPr>
-          <p:cNvPr id="383" name="CustomShape 3"/>
+          <p:cNvPr id="387" name="CustomShape 3"/>
           <p:cNvSpPr/>
           <p:nvPr/>
         </p:nvSpPr>
@@ -28033,6 +28173,254 @@
               </a:solidFill>
               <a:latin typeface="Arial"/>
               <a:ea typeface="DejaVu Sans"/>
+            </a:endParaRPr>
+          </a:p>
+        </p:txBody>
+      </p:sp>
+    </p:spTree>
+  </p:cSld>
+  <mc:AlternateContent>
+    <mc:Choice Requires="p14">
+      <p:transition spd="slow" p14:dur="2000"/>
+    </mc:Choice>
+    <mc:Fallback>
+      <p:transition spd="slow"/>
+    </mc:Fallback>
+  </mc:AlternateContent>
+</p:sld>
+</file>
+
+<file path=ppt/slides/slide20.xml><?xml version="1.0" encoding="utf-8"?>
+<p:sld xmlns:a="http://schemas.openxmlformats.org/drawingml/2006/main" xmlns:p="http://schemas.openxmlformats.org/presentationml/2006/main" xmlns:r="http://schemas.openxmlformats.org/officeDocument/2006/relationships" xmlns:p14="http://schemas.microsoft.com/office/powerpoint/2010/main" xmlns:p15="http://schemas.microsoft.com/office/powerpoint/2012/main" xmlns:mc="http://schemas.openxmlformats.org/markup-compatibility/2006">
+  <p:cSld>
+    <p:spTree>
+      <p:nvGrpSpPr>
+        <p:cNvPr id="1" name=""/>
+        <p:cNvGrpSpPr/>
+        <p:nvPr/>
+      </p:nvGrpSpPr>
+      <p:grpSpPr>
+        <a:xfrm>
+          <a:off x="0" y="0"/>
+          <a:ext cx="0" cy="0"/>
+          <a:chOff x="0" y="0"/>
+          <a:chExt cx="0" cy="0"/>
+        </a:xfrm>
+      </p:grpSpPr>
+      <p:sp>
+        <p:nvSpPr>
+          <p:cNvPr id="357" name="CustomShape 10"/>
+          <p:cNvSpPr/>
+          <p:nvPr/>
+        </p:nvSpPr>
+        <p:spPr>
+          <a:xfrm>
+            <a:off x="360000" y="360000"/>
+            <a:ext cx="9354600" cy="894600"/>
+          </a:xfrm>
+          <a:prstGeom prst="rect">
+            <a:avLst/>
+          </a:prstGeom>
+          <a:noFill/>
+          <a:ln w="0">
+            <a:noFill/>
+          </a:ln>
+        </p:spPr>
+        <p:style>
+          <a:lnRef idx="0"/>
+          <a:fillRef idx="0"/>
+          <a:effectRef idx="0"/>
+          <a:fontRef idx="minor"/>
+        </p:style>
+        <p:txBody>
+          <a:bodyPr lIns="0" rIns="0" tIns="0" bIns="0" anchor="b">
+            <a:noAutofit/>
+          </a:bodyPr>
+          <a:p>
+            <a:pPr defTabSz="914400">
+              <a:lnSpc>
+                <a:spcPct val="100000"/>
+              </a:lnSpc>
+            </a:pPr>
+            <a:r>
+              <a:rPr b="1" lang="en-US" sz="3200" spc="-1" strike="noStrike">
+                <a:solidFill>
+                  <a:srgbClr val="ffffff"/>
+                </a:solidFill>
+                <a:latin typeface="Latin Modern Sans"/>
+                <a:ea typeface="DejaVu Sans"/>
+              </a:rPr>
+              <a:t>Let’s Code!</a:t>
+            </a:r>
+            <a:endParaRPr b="0" lang="en-US" sz="3200" spc="-1" strike="noStrike">
+              <a:solidFill>
+                <a:srgbClr val="000000"/>
+              </a:solidFill>
+              <a:latin typeface="Arial"/>
+            </a:endParaRPr>
+          </a:p>
+        </p:txBody>
+      </p:sp>
+      <p:sp>
+        <p:nvSpPr>
+          <p:cNvPr id="358" name="CustomShape 11"/>
+          <p:cNvSpPr/>
+          <p:nvPr/>
+        </p:nvSpPr>
+        <p:spPr>
+          <a:xfrm>
+            <a:off x="897120" y="6886080"/>
+            <a:ext cx="6441840" cy="359640"/>
+          </a:xfrm>
+          <a:prstGeom prst="rect">
+            <a:avLst/>
+          </a:prstGeom>
+          <a:noFill/>
+          <a:ln w="0">
+            <a:noFill/>
+          </a:ln>
+        </p:spPr>
+        <p:style>
+          <a:lnRef idx="0"/>
+          <a:fillRef idx="0"/>
+          <a:effectRef idx="0"/>
+          <a:fontRef idx="minor"/>
+        </p:style>
+        <p:txBody>
+          <a:bodyPr lIns="90000" rIns="90000" tIns="45000" bIns="45000" anchor="t">
+            <a:noAutofit/>
+          </a:bodyPr>
+          <a:p>
+            <a:pPr defTabSz="914400">
+              <a:lnSpc>
+                <a:spcPct val="100000"/>
+              </a:lnSpc>
+            </a:pPr>
+            <a:r>
+              <a:rPr b="0" lang="pt-BR" sz="1800" spc="-1" strike="noStrike">
+                <a:solidFill>
+                  <a:srgbClr val="000000"/>
+                </a:solidFill>
+                <a:latin typeface="Arial"/>
+                <a:ea typeface="DejaVu Sans"/>
+              </a:rPr>
+              <a:t>Computer Vision - Prof. André Hochuli</a:t>
+            </a:r>
+            <a:endParaRPr b="0" lang="en-US" sz="1800" spc="-1" strike="noStrike">
+              <a:solidFill>
+                <a:srgbClr val="000000"/>
+              </a:solidFill>
+              <a:latin typeface="Arial"/>
+            </a:endParaRPr>
+          </a:p>
+        </p:txBody>
+      </p:sp>
+      <p:sp>
+        <p:nvSpPr>
+          <p:cNvPr id="359" name="CustomShape 12"/>
+          <p:cNvSpPr/>
+          <p:nvPr/>
+        </p:nvSpPr>
+        <p:spPr>
+          <a:xfrm>
+            <a:off x="7608600" y="6886080"/>
+            <a:ext cx="2279880" cy="359640"/>
+          </a:xfrm>
+          <a:prstGeom prst="rect">
+            <a:avLst/>
+          </a:prstGeom>
+          <a:noFill/>
+          <a:ln w="0">
+            <a:noFill/>
+          </a:ln>
+        </p:spPr>
+        <p:style>
+          <a:lnRef idx="0"/>
+          <a:fillRef idx="0"/>
+          <a:effectRef idx="0"/>
+          <a:fontRef idx="minor"/>
+        </p:style>
+        <p:txBody>
+          <a:bodyPr lIns="90000" rIns="90000" tIns="45000" bIns="45000" anchor="t">
+            <a:noAutofit/>
+          </a:bodyPr>
+          <a:p>
+            <a:pPr defTabSz="914400">
+              <a:lnSpc>
+                <a:spcPct val="100000"/>
+              </a:lnSpc>
+            </a:pPr>
+            <a:r>
+              <a:rPr b="0" lang="en-US" sz="1800" spc="-1" strike="noStrike">
+                <a:solidFill>
+                  <a:srgbClr val="000000"/>
+                </a:solidFill>
+                <a:latin typeface="Arial"/>
+                <a:ea typeface="DejaVu Sans"/>
+              </a:rPr>
+              <a:t>Lecture</a:t>
+            </a:r>
+            <a:r>
+              <a:rPr b="0" lang="pt-BR" sz="1800" spc="-1" strike="noStrike">
+                <a:solidFill>
+                  <a:srgbClr val="000000"/>
+                </a:solidFill>
+                <a:latin typeface="Arial"/>
+                <a:ea typeface="DejaVu Sans"/>
+              </a:rPr>
+              <a:t> 04</a:t>
+            </a:r>
+            <a:endParaRPr b="0" lang="en-US" sz="1800" spc="-1" strike="noStrike">
+              <a:solidFill>
+                <a:srgbClr val="000000"/>
+              </a:solidFill>
+              <a:latin typeface="Arial"/>
+            </a:endParaRPr>
+          </a:p>
+        </p:txBody>
+      </p:sp>
+      <p:sp>
+        <p:nvSpPr>
+          <p:cNvPr id="360" name=""/>
+          <p:cNvSpPr txBox="1"/>
+          <p:nvPr/>
+        </p:nvSpPr>
+        <p:spPr>
+          <a:xfrm>
+            <a:off x="0" y="457200"/>
+            <a:ext cx="9945000" cy="6629400"/>
+          </a:xfrm>
+          <a:prstGeom prst="rect">
+            <a:avLst/>
+          </a:prstGeom>
+          <a:blipFill rotWithShape="0">
+            <a:blip r:embed="rId1"/>
+            <a:stretch/>
+          </a:blipFill>
+          <a:ln w="0">
+            <a:noFill/>
+          </a:ln>
+        </p:spPr>
+        <p:txBody>
+          <a:bodyPr lIns="90000" rIns="90000" tIns="45000" bIns="45000" anchor="ctr" anchorCtr="1">
+            <a:noAutofit/>
+          </a:bodyPr>
+          <a:p>
+            <a:pPr algn="ctr"/>
+            <a:r>
+              <a:rPr b="0" lang="en-US" sz="1800" spc="-1" strike="noStrike">
+                <a:solidFill>
+                  <a:srgbClr val="000000"/>
+                </a:solidFill>
+                <a:latin typeface="Arial"/>
+              </a:rPr>
+              <a:t>pp</a:t>
+            </a:r>
+            <a:endParaRPr b="0" lang="en-US" sz="1800" spc="-1" strike="noStrike">
+              <a:solidFill>
+                <a:srgbClr val="000000"/>
+              </a:solidFill>
+              <a:latin typeface="Arial"/>
             </a:endParaRPr>
           </a:p>
         </p:txBody>
